--- a/Presentation.pptx
+++ b/Presentation.pptx
@@ -33,9 +33,10 @@
     <p:sldId id="281" r:id="rId27"/>
     <p:sldId id="282" r:id="rId28"/>
     <p:sldId id="283" r:id="rId29"/>
+    <p:sldId id="284" r:id="rId30"/>
   </p:sldIdLst>
   <p:notesMasterIdLst>
-    <p:notesMasterId r:id="rId30"/>
+    <p:notesMasterId r:id="rId31"/>
   </p:notesMasterIdLst>
   <p:sldSz cx="12192000" cy="6858000"/>
   <p:notesSz cx="6858000" cy="12192000"/>
@@ -1423,9 +1424,8 @@
           <a:p>
             <a:r>
               <a:rPr lang="en-US" dirty="0"/>
-              <a:t>This is the key design principle: skills dictate which MCP tools to build — not the other way around. You start from a developer use case, design the skill workflow, and then implement only the MCP tools that skill needs.
-We started from three developer workflows. "Check my changes before pushing" drove the pre-commit skill, which needed the pre_commit_analyze tool. "What findings does my MR have?" drove the merge-request-findings skill, which needed list_merge_requests and get_merge_request_finding_churn. "Close my test gaps" drove the close-test-gaps skill, which needed get_test_gap_treemap and get_merge_request_test_suggestions.
-If you build tools first and hope someone uses them, you get 121 endpoints nobody orchestrates. If you start from skills, you get exactly the tools developers need.</a:t>
+              <a:t>Right now there are two authentication options, and both have problems. Environment variables must be set before the MCP server starts — if they're missing, the server fails. The alternative is passing credentials in-prompt as tool parameters, which means they're sent to the LLM. Neither is ideal.
+We see three possible improvements. OAuth or SSO would use browser-based login with a token stored locally that never reaches the LLM. System keychain integration would read credentials from the OS keychain. A local config file like .teamscale.json could store connection details without exposing them as tool parameters.</a:t>
             </a:r>
             <a:endParaRPr lang="en-US" dirty="0"/>
           </a:p>
@@ -1513,9 +1513,9 @@
           <a:p>
             <a:r>
               <a:rPr lang="en-US" dirty="0"/>
-              <a:t>We connected Teamscale to Claude Code so developers can run findings analysis, fix code quality issues, and close test gaps — all from the command line.
+              <a:t>I connected Teamscale to Claude Code so developers can run findings analysis, fix code quality issues, and close test gaps — all from the command line.
 The stack has two layers. The MCP server is the low-level bridge — it exposes Teamscale REST API endpoints as tools Claude can call. Skills sit on top and orchestrate those tools into things developers actually want to do, like "check my changes before pushing" or "fix findings on my MR."
-We built three MCP server implementations to compare approaches, and five skills that demonstrate the real value.</a:t>
+I built three MCP server implementations to compare approaches, and five skills that demonstrate the real value.</a:t>
             </a:r>
             <a:endParaRPr lang="en-US" dirty="0"/>
           </a:p>
@@ -1558,95 +1558,6 @@
 </file>
 
 <file path=ppt/notesSlides/notesSlide20.xml><?xml version="1.0" encoding="utf-8"?>
-<p:notes xmlns:a="http://schemas.openxmlformats.org/drawingml/2006/main" xmlns:r="http://schemas.openxmlformats.org/officeDocument/2006/relationships" xmlns:p="http://schemas.openxmlformats.org/presentationml/2006/main">
-  <p:cSld>
-    <p:spTree>
-      <p:nvGrpSpPr>
-        <p:cNvPr id="1" name=""/>
-        <p:cNvGrpSpPr/>
-        <p:nvPr/>
-      </p:nvGrpSpPr>
-      <p:grpSpPr>
-        <a:xfrm>
-          <a:off x="0" y="0"/>
-          <a:ext cx="0" cy="0"/>
-          <a:chOff x="0" y="0"/>
-          <a:chExt cx="0" cy="0"/>
-        </a:xfrm>
-      </p:grpSpPr>
-      <p:sp>
-        <p:nvSpPr>
-          <p:cNvPr id="2" name="Slide Image Placeholder 1"/>
-          <p:cNvSpPr>
-            <a:spLocks noGrp="1" noRot="1" noChangeAspect="1"/>
-          </p:cNvSpPr>
-          <p:nvPr>
-            <p:ph type="sldImg"/>
-          </p:nvPr>
-        </p:nvSpPr>
-        <p:spPr/>
-      </p:sp>
-      <p:sp>
-        <p:nvSpPr>
-          <p:cNvPr id="3" name="Notes Placeholder 2"/>
-          <p:cNvSpPr>
-            <a:spLocks noGrp="1"/>
-          </p:cNvSpPr>
-          <p:nvPr>
-            <p:ph type="body" idx="1"/>
-          </p:nvPr>
-        </p:nvSpPr>
-        <p:spPr/>
-        <p:txBody>
-          <a:bodyPr/>
-          <a:lstStyle/>
-          <a:p>
-            <a:r>
-              <a:rPr lang="en-US" dirty="0"/>
-              <a:t>Right now there are two authentication options, and both have problems. Environment variables must be set before the MCP server starts — if they're missing, the server fails. The alternative is passing credentials in-prompt as tool parameters, which means they're sent to the LLM. Neither is ideal.
-We see three possible improvements. OAuth or SSO would use browser-based login with a token stored locally that never reaches the LLM. System keychain integration would read credentials from the OS keychain. A local config file like .teamscale.json could store connection details without exposing them as tool parameters.</a:t>
-            </a:r>
-            <a:endParaRPr lang="en-US" dirty="0"/>
-          </a:p>
-        </p:txBody>
-      </p:sp>
-      <p:sp>
-        <p:nvSpPr>
-          <p:cNvPr id="4" name="Slide Number Placeholder 3"/>
-          <p:cNvSpPr>
-            <a:spLocks noGrp="1"/>
-          </p:cNvSpPr>
-          <p:nvPr>
-            <p:ph type="sldNum" sz="quarter" idx="10"/>
-          </p:nvPr>
-        </p:nvSpPr>
-        <p:spPr/>
-        <p:txBody>
-          <a:bodyPr/>
-          <a:lstStyle/>
-          <a:p>
-            <a:fld id="{F7021451-1387-4CA6-816F-3879F97B5CBC}" type="slidenum">
-              <a:rPr lang="en-US"/>
-              <a:t>20</a:t>
-            </a:fld>
-            <a:endParaRPr lang="en-US"/>
-          </a:p>
-        </p:txBody>
-      </p:sp>
-    </p:spTree>
-    <p:extLst>
-      <p:ext uri="{BB962C8B-B14F-4D97-AF65-F5344CB8AC3E}">
-        <p14:creationId xmlns:p14="http://schemas.microsoft.com/office/powerpoint/2010/main" val="1024086991"/>
-      </p:ext>
-    </p:extLst>
-  </p:cSld>
-  <p:clrMapOvr>
-    <a:masterClrMapping/>
-  </p:clrMapOvr>
-</p:notes>
-</file>
-
-<file path=ppt/notesSlides/notesSlide21.xml><?xml version="1.0" encoding="utf-8"?>
 <p:notes xmlns:a="http://schemas.openxmlformats.org/drawingml/2006/main" xmlns:r="http://schemas.openxmlformats.org/officeDocument/2006/relationships" xmlns:p="http://schemas.openxmlformats.org/presentationml/2006/main">
   <p:cSld>
     <p:spTree>
@@ -1716,7 +1627,7 @@
           <a:p>
             <a:fld id="{F7021451-1387-4CA6-816F-3879F97B5CBC}" type="slidenum">
               <a:rPr lang="en-US"/>
-              <a:t>21</a:t>
+              <a:t>20</a:t>
             </a:fld>
             <a:endParaRPr lang="en-US"/>
           </a:p>
@@ -1735,6 +1646,96 @@
 </p:notes>
 </file>
 
+<file path=ppt/notesSlides/notesSlide21.xml><?xml version="1.0" encoding="utf-8"?>
+<p:notes xmlns:a="http://schemas.openxmlformats.org/drawingml/2006/main" xmlns:r="http://schemas.openxmlformats.org/officeDocument/2006/relationships" xmlns:p="http://schemas.openxmlformats.org/presentationml/2006/main">
+  <p:cSld>
+    <p:spTree>
+      <p:nvGrpSpPr>
+        <p:cNvPr id="1" name=""/>
+        <p:cNvGrpSpPr/>
+        <p:nvPr/>
+      </p:nvGrpSpPr>
+      <p:grpSpPr>
+        <a:xfrm>
+          <a:off x="0" y="0"/>
+          <a:ext cx="0" cy="0"/>
+          <a:chOff x="0" y="0"/>
+          <a:chExt cx="0" cy="0"/>
+        </a:xfrm>
+      </p:grpSpPr>
+      <p:sp>
+        <p:nvSpPr>
+          <p:cNvPr id="2" name="Slide Image Placeholder 1"/>
+          <p:cNvSpPr>
+            <a:spLocks noGrp="1" noRot="1" noChangeAspect="1"/>
+          </p:cNvSpPr>
+          <p:nvPr>
+            <p:ph type="sldImg"/>
+          </p:nvPr>
+        </p:nvSpPr>
+        <p:spPr/>
+      </p:sp>
+      <p:sp>
+        <p:nvSpPr>
+          <p:cNvPr id="3" name="Notes Placeholder 2"/>
+          <p:cNvSpPr>
+            <a:spLocks noGrp="1"/>
+          </p:cNvSpPr>
+          <p:nvPr>
+            <p:ph type="body" idx="1"/>
+          </p:nvPr>
+        </p:nvSpPr>
+        <p:spPr/>
+        <p:txBody>
+          <a:bodyPr/>
+          <a:lstStyle/>
+          <a:p>
+            <a:r>
+              <a:rPr lang="en-US" dirty="0"/>
+              <a:t>This is the key design principle: skills dictate which MCP tools to build — not the other way around. You start from a developer use case, design the skill workflow, and then implement only the MCP tools that skill needs.
+We started from three developer workflows. "Check my changes before pushing" drove the pre-commit skill, which needed the pre_commit_analyze tool. "What findings does my MR have?" drove the merge-request-findings skill, which needed list_merge_requests and get_merge_request_finding_churn. "Close my test gaps" drove the close-test-gaps skill, which needed get_test_gap_treemap and get_merge_request_test_suggestions.
+If you build tools first and hope someone uses them, you get 121 endpoints nobody orchestrates. If you start from skills, you get exactly the tools developers need.</a:t>
+            </a:r>
+            <a:endParaRPr lang="en-US" dirty="0"/>
+          </a:p>
+        </p:txBody>
+      </p:sp>
+      <p:sp>
+        <p:nvSpPr>
+          <p:cNvPr id="4" name="Slide Number Placeholder 3"/>
+          <p:cNvSpPr>
+            <a:spLocks noGrp="1"/>
+          </p:cNvSpPr>
+          <p:nvPr>
+            <p:ph type="sldNum" sz="quarter" idx="10"/>
+          </p:nvPr>
+        </p:nvSpPr>
+        <p:spPr/>
+        <p:txBody>
+          <a:bodyPr/>
+          <a:lstStyle/>
+          <a:p>
+            <a:fld id="{F7021451-1387-4CA6-816F-3879F97B5CBC}" type="slidenum">
+              <a:rPr lang="en-US"/>
+              <a:t>21</a:t>
+            </a:fld>
+            <a:endParaRPr lang="en-US"/>
+          </a:p>
+        </p:txBody>
+      </p:sp>
+    </p:spTree>
+    <p:extLst>
+      <p:ext uri="{BB962C8B-B14F-4D97-AF65-F5344CB8AC3E}">
+        <p14:creationId xmlns:p14="http://schemas.microsoft.com/office/powerpoint/2010/main" val="1024086991"/>
+      </p:ext>
+    </p:extLst>
+  </p:cSld>
+  <p:clrMapOvr>
+    <a:masterClrMapping/>
+  </p:clrMapOvr>
+</p:notes>
+</file>
+
 <file path=ppt/notesSlides/notesSlide22.xml><?xml version="1.0" encoding="utf-8"?>
 <p:notes xmlns:a="http://schemas.openxmlformats.org/drawingml/2006/main" xmlns:r="http://schemas.openxmlformats.org/officeDocument/2006/relationships" xmlns:p="http://schemas.openxmlformats.org/presentationml/2006/main">
   <p:cSld>
@@ -1824,6 +1825,96 @@
 </file>
 
 <file path=ppt/notesSlides/notesSlide23.xml><?xml version="1.0" encoding="utf-8"?>
+<p:notes xmlns:a="http://schemas.openxmlformats.org/drawingml/2006/main" xmlns:r="http://schemas.openxmlformats.org/officeDocument/2006/relationships" xmlns:p="http://schemas.openxmlformats.org/presentationml/2006/main">
+  <p:cSld>
+    <p:spTree>
+      <p:nvGrpSpPr>
+        <p:cNvPr id="1" name=""/>
+        <p:cNvGrpSpPr/>
+        <p:nvPr/>
+      </p:nvGrpSpPr>
+      <p:grpSpPr>
+        <a:xfrm>
+          <a:off x="0" y="0"/>
+          <a:ext cx="0" cy="0"/>
+          <a:chOff x="0" y="0"/>
+          <a:chExt cx="0" cy="0"/>
+        </a:xfrm>
+      </p:grpSpPr>
+      <p:sp>
+        <p:nvSpPr>
+          <p:cNvPr id="2" name="Slide Image Placeholder 1"/>
+          <p:cNvSpPr>
+            <a:spLocks noGrp="1" noRot="1" noChangeAspect="1"/>
+          </p:cNvSpPr>
+          <p:nvPr>
+            <p:ph type="sldImg"/>
+          </p:nvPr>
+        </p:nvSpPr>
+        <p:spPr/>
+      </p:sp>
+      <p:sp>
+        <p:nvSpPr>
+          <p:cNvPr id="3" name="Notes Placeholder 2"/>
+          <p:cNvSpPr>
+            <a:spLocks noGrp="1"/>
+          </p:cNvSpPr>
+          <p:nvPr>
+            <p:ph type="body" idx="1"/>
+          </p:nvPr>
+        </p:nvSpPr>
+        <p:spPr/>
+        <p:txBody>
+          <a:bodyPr/>
+          <a:lstStyle/>
+          <a:p>
+            <a:r>
+              <a:rPr lang="en-US" dirty="0"/>
+              <a:t>The plugin itself — skills, configuration, metadata — is straightforward to distribute. We can host it in our own GitHub repository, which works today and gives us full control over releases. Or we publish it to the public Claude Code marketplace for broader reach and discoverability.
+Either option works, and the plugin content is the same: skills plus a reference to the MCP server backend. The skills are just Markdown files, so distribution is simple.
+The real architectural question is where the MCP server lives — that's where the tradeoffs get interesting. So let's focus on that.</a:t>
+            </a:r>
+            <a:endParaRPr lang="en-US" dirty="0"/>
+          </a:p>
+        </p:txBody>
+      </p:sp>
+      <p:sp>
+        <p:nvSpPr>
+          <p:cNvPr id="4" name="Slide Number Placeholder 3"/>
+          <p:cNvSpPr>
+            <a:spLocks noGrp="1"/>
+          </p:cNvSpPr>
+          <p:nvPr>
+            <p:ph type="sldNum" sz="quarter" idx="10"/>
+          </p:nvPr>
+        </p:nvSpPr>
+        <p:spPr/>
+        <p:txBody>
+          <a:bodyPr/>
+          <a:lstStyle/>
+          <a:p>
+            <a:fld id="{F7021451-1387-4CA6-816F-3879F97B5CBC}" type="slidenum">
+              <a:rPr lang="en-US"/>
+              <a:t>23</a:t>
+            </a:fld>
+            <a:endParaRPr lang="en-US"/>
+          </a:p>
+        </p:txBody>
+      </p:sp>
+    </p:spTree>
+    <p:extLst>
+      <p:ext uri="{BB962C8B-B14F-4D97-AF65-F5344CB8AC3E}">
+        <p14:creationId xmlns:p14="http://schemas.microsoft.com/office/powerpoint/2010/main" val="1024086991"/>
+      </p:ext>
+    </p:extLst>
+  </p:cSld>
+  <p:clrMapOvr>
+    <a:masterClrMapping/>
+  </p:clrMapOvr>
+</p:notes>
+</file>
+
+<file path=ppt/notesSlides/notesSlide24.xml><?xml version="1.0" encoding="utf-8"?>
 <p:notes xmlns:a="http://schemas.openxmlformats.org/drawingml/2006/main" xmlns:r="http://schemas.openxmlformats.org/officeDocument/2006/relationships" xmlns:p="http://schemas.openxmlformats.org/presentationml/2006/main">
   <p:cSld>
     <p:spTree>
@@ -1893,7 +1984,7 @@
           <a:p>
             <a:fld id="{F7021451-1387-4CA6-816F-3879F97B5CBC}" type="slidenum">
               <a:rPr lang="en-US"/>
-              <a:t>23</a:t>
+              <a:t>24</a:t>
             </a:fld>
             <a:endParaRPr lang="en-US"/>
           </a:p>
@@ -1912,7 +2003,7 @@
 </p:notes>
 </file>
 
-<file path=ppt/notesSlides/notesSlide24.xml><?xml version="1.0" encoding="utf-8"?>
+<file path=ppt/notesSlides/notesSlide25.xml><?xml version="1.0" encoding="utf-8"?>
 <p:notes xmlns:a="http://schemas.openxmlformats.org/drawingml/2006/main" xmlns:r="http://schemas.openxmlformats.org/officeDocument/2006/relationships" xmlns:p="http://schemas.openxmlformats.org/presentationml/2006/main">
   <p:cSld>
     <p:spTree>
@@ -1958,8 +2049,8 @@
           <a:p>
             <a:r>
               <a:rPr lang="en-US" dirty="0"/>
-              <a:t>Everything runs locally. teamscale-dev already manages credentials, handles API versioning, and reads files from disk. It already has an MCP mode — teamscale-dev mcp — that we've been using.
-In this model, the plugin ships skills only and points to teamscale-dev as the MCP server. No generated client, no API drift, no auth issues. The strength is simplicity: a single binary that works offline with no server changes needed.</a:t>
+              <a:t>teamscale-dev already manages credentials, handles API versioning, and reads files from disk. It already has an MCP mode — teamscale-dev mcp — that we've been using.
+In this model, the plugin is minimal: it ships skills and a pointer to teamscale-dev as the MCP server backend. No generated client, no API drift, no auth issues. teamscale-dev still talks to a remote Teamscale server, but the plugin itself is simple — just skills and configuration.</a:t>
             </a:r>
             <a:endParaRPr lang="en-US" dirty="0"/>
           </a:p>
@@ -1982,7 +2073,7 @@
           <a:p>
             <a:fld id="{F7021451-1387-4CA6-816F-3879F97B5CBC}" type="slidenum">
               <a:rPr lang="en-US"/>
-              <a:t>24</a:t>
+              <a:t>25</a:t>
             </a:fld>
             <a:endParaRPr lang="en-US"/>
           </a:p>
@@ -2001,7 +2092,7 @@
 </p:notes>
 </file>
 
-<file path=ppt/notesSlides/notesSlide25.xml><?xml version="1.0" encoding="utf-8"?>
+<file path=ppt/notesSlides/notesSlide26.xml><?xml version="1.0" encoding="utf-8"?>
 <p:notes xmlns:a="http://schemas.openxmlformats.org/drawingml/2006/main" xmlns:r="http://schemas.openxmlformats.org/officeDocument/2006/relationships" xmlns:p="http://schemas.openxmlformats.org/presentationml/2006/main">
   <p:cSld>
     <p:spTree>
@@ -2048,7 +2139,7 @@
             <a:r>
               <a:rPr lang="en-US" dirty="0"/>
               <a:t>This option splits the work between a remote MCP hosted by Teamscale and a thin local MCP for filesystem operations.
-The remote MCP handles everything that lives on the server: findings, metrics, test gaps, merge requests, and authentication. The local MCP handles everything that needs the filesystem: constructing diffs, reading file contents, building change lists for pre-commit.</a:t>
+The remote MCP handles everything that lives on the server — findings, metrics, test gaps, merge requests. Auth is server-side: the local MCP handles login and only passes a token to /mcp. The local MCP also handles everything that needs the filesystem: constructing diffs, reading file contents, building change lists for pre-commit.</a:t>
             </a:r>
             <a:endParaRPr lang="en-US" dirty="0"/>
           </a:p>
@@ -2071,7 +2162,7 @@
           <a:p>
             <a:fld id="{F7021451-1387-4CA6-816F-3879F97B5CBC}" type="slidenum">
               <a:rPr lang="en-US"/>
-              <a:t>25</a:t>
+              <a:t>26</a:t>
             </a:fld>
             <a:endParaRPr lang="en-US"/>
           </a:p>
@@ -2090,7 +2181,7 @@
 </p:notes>
 </file>
 
-<file path=ppt/notesSlides/notesSlide26.xml><?xml version="1.0" encoding="utf-8"?>
+<file path=ppt/notesSlides/notesSlide27.xml><?xml version="1.0" encoding="utf-8"?>
 <p:notes xmlns:a="http://schemas.openxmlformats.org/drawingml/2006/main" xmlns:r="http://schemas.openxmlformats.org/officeDocument/2006/relationships" xmlns:p="http://schemas.openxmlformats.org/presentationml/2006/main">
   <p:cSld>
     <p:spTree>
@@ -2161,7 +2252,7 @@
           <a:p>
             <a:fld id="{F7021451-1387-4CA6-816F-3879F97B5CBC}" type="slidenum">
               <a:rPr lang="en-US"/>
-              <a:t>26</a:t>
+              <a:t>27</a:t>
             </a:fld>
             <a:endParaRPr lang="en-US"/>
           </a:p>
@@ -2180,7 +2271,7 @@
 </p:notes>
 </file>
 
-<file path=ppt/notesSlides/notesSlide27.xml><?xml version="1.0" encoding="utf-8"?>
+<file path=ppt/notesSlides/notesSlide28.xml><?xml version="1.0" encoding="utf-8"?>
 <p:notes xmlns:a="http://schemas.openxmlformats.org/drawingml/2006/main" xmlns:r="http://schemas.openxmlformats.org/officeDocument/2006/relationships" xmlns:p="http://schemas.openxmlformats.org/presentationml/2006/main">
   <p:cSld>
     <p:spTree>
@@ -2252,7 +2343,7 @@
           <a:p>
             <a:fld id="{F7021451-1387-4CA6-816F-3879F97B5CBC}" type="slidenum">
               <a:rPr lang="en-US"/>
-              <a:t>27</a:t>
+              <a:t>28</a:t>
             </a:fld>
             <a:endParaRPr lang="en-US"/>
           </a:p>
@@ -2271,7 +2362,7 @@
 </p:notes>
 </file>
 
-<file path=ppt/notesSlides/notesSlide28.xml><?xml version="1.0" encoding="utf-8"?>
+<file path=ppt/notesSlides/notesSlide29.xml><?xml version="1.0" encoding="utf-8"?>
 <p:notes xmlns:a="http://schemas.openxmlformats.org/drawingml/2006/main" xmlns:r="http://schemas.openxmlformats.org/officeDocument/2006/relationships" xmlns:p="http://schemas.openxmlformats.org/presentationml/2006/main">
   <p:cSld>
     <p:spTree>
@@ -2340,7 +2431,7 @@
           <a:p>
             <a:fld id="{F7021451-1387-4CA6-816F-3879F97B5CBC}" type="slidenum">
               <a:rPr lang="en-US"/>
-              <a:t>28</a:t>
+              <a:t>29</a:t>
             </a:fld>
             <a:endParaRPr lang="en-US"/>
           </a:p>
@@ -2406,7 +2497,7 @@
             <a:r>
               <a:rPr lang="en-US" dirty="0"/>
               <a:t>MCP is an open protocol that lets AI assistants call external tools and read external data. An MCP server exposes tools — actions the model can invoke, like "list projects" or "get findings" — and resources, which are read-only data endpoints.
-Claude Code has native MCP support through its plugin system, so any MCP server can be installed as a plugin. We built three plugins that bridge Claude Code to the Teamscale REST API, each with a different approach to see what works best in practice.</a:t>
+Claude Code has native MCP support through its plugin system, so any MCP server can be installed as a plugin. I built three plugins that bridge Claude Code to the Teamscale REST API, each with a different approach to see what works best in practice.</a:t>
             </a:r>
             <a:endParaRPr lang="en-US" dirty="0"/>
           </a:p>
@@ -2494,7 +2585,7 @@
           <a:p>
             <a:r>
               <a:rPr lang="en-US" dirty="0"/>
-              <a:t>We tried three different approaches to building the MCP server. The first auto-generates everything from the OpenAPI spec — minimal code, full coverage, but no curation. The other two are hand-crafted: we picked the endpoints developers actually need and added business logic on top.
+              <a:t>I tried three different approaches to building the MCP server. The first auto-generates everything from the OpenAPI spec — minimal code, full coverage, but no curation. The other two are hand-crafted: I picked the endpoints developers actually need and added business logic on top.
 The Python and TypeScript custom servers expose identical tools — same functionality, different runtimes. This let us compare the developer experience of building MCP servers in both languages. The custom servers also support zero-config installation: connection params can be passed per tool call, falling back to environment variables.</a:t>
             </a:r>
             <a:endParaRPr lang="en-US" dirty="0"/>
@@ -2672,10 +2763,10 @@
           <a:p>
             <a:r>
               <a:rPr lang="en-US" dirty="0"/>
-              <a:t>The custom plugins are hand-written. We picked the ~20 endpoints developers actually need and added business logic on top — things like aggregating findings by file, verifying architecture, or detecting the right project from the git remote URL.
+              <a:t>The custom plugins are hand-written. I picked the ~20 endpoints developers actually need and added business logic on top — things like aggregating findings by file, verifying architecture, or detecting the right project from the git remote URL.
 The tools have uniform error handling and optional connection parameters. You can pass server, user, and access key per tool call, or let it fall back to environment variables. This means zero-config installation — the plugin just works.
 Claude reliably picks the right tool because the set is small and each tool has a clear, distinct purpose. The tradeoff is that every new endpoint requires manual work to add.
-We built both a Python and TypeScript version with identical tools to compare the developer experience.</a:t>
+I built both a Python and TypeScript version with identical tools to compare the developer experience.</a:t>
             </a:r>
             <a:endParaRPr lang="en-US" dirty="0"/>
           </a:p>
@@ -4074,6 +4165,45 @@
 <file path=ppt/slides/slide28.xml><?xml version="1.0" encoding="utf-8"?>
 <p:sld xmlns:a="http://schemas.openxmlformats.org/drawingml/2006/main" xmlns:r="http://schemas.openxmlformats.org/officeDocument/2006/relationships" xmlns:p="http://schemas.openxmlformats.org/presentationml/2006/main">
   <p:cSld name="Slide 28">
+    <p:bg>
+      <p:bgPr>
+        <a:blipFill dpi="0" rotWithShape="1">
+          <a:blip r:embed="rId1">
+            <a:lum/>
+          </a:blip>
+          <a:srcRect/>
+          <a:stretch>
+            <a:fillRect/>
+          </a:stretch>
+        </a:blipFill>
+        <a:effectLst/>
+      </p:bgPr>
+    </p:bg>
+    <p:spTree>
+      <p:nvGrpSpPr>
+        <p:cNvPr id="1" name=""/>
+        <p:cNvGrpSpPr/>
+        <p:nvPr/>
+      </p:nvGrpSpPr>
+      <p:grpSpPr>
+        <a:xfrm>
+          <a:off x="0" y="0"/>
+          <a:ext cx="0" cy="0"/>
+          <a:chOff x="0" y="0"/>
+          <a:chExt cx="0" cy="0"/>
+        </a:xfrm>
+      </p:grpSpPr>
+    </p:spTree>
+  </p:cSld>
+  <p:clrMapOvr>
+    <a:masterClrMapping/>
+  </p:clrMapOvr>
+</p:sld>
+</file>
+
+<file path=ppt/slides/slide29.xml><?xml version="1.0" encoding="utf-8"?>
+<p:sld xmlns:a="http://schemas.openxmlformats.org/drawingml/2006/main" xmlns:r="http://schemas.openxmlformats.org/officeDocument/2006/relationships" xmlns:p="http://schemas.openxmlformats.org/presentationml/2006/main">
+  <p:cSld name="Slide 29">
     <p:bg>
       <p:bgPr>
         <a:blipFill dpi="0" rotWithShape="1">
